--- a/Lesmateriaal/Slides/Cysec – les 3 - Internationale en europese wetten.pptx
+++ b/Lesmateriaal/Slides/Cysec – les 3 - Internationale en europese wetten.pptx
@@ -5,7 +5,7 @@
     <p:sldMasterId id="2147483648" r:id="rId1"/>
   </p:sldMasterIdLst>
   <p:notesMasterIdLst>
-    <p:notesMasterId r:id="rId24"/>
+    <p:notesMasterId r:id="rId19"/>
   </p:notesMasterIdLst>
   <p:sldIdLst>
     <p:sldId id="256" r:id="rId2"/>
@@ -21,15 +21,10 @@
     <p:sldId id="276" r:id="rId12"/>
     <p:sldId id="277" r:id="rId13"/>
     <p:sldId id="275" r:id="rId14"/>
-    <p:sldId id="266" r:id="rId15"/>
-    <p:sldId id="267" r:id="rId16"/>
-    <p:sldId id="272" r:id="rId17"/>
-    <p:sldId id="271" r:id="rId18"/>
-    <p:sldId id="270" r:id="rId19"/>
-    <p:sldId id="278" r:id="rId20"/>
-    <p:sldId id="279" r:id="rId21"/>
-    <p:sldId id="280" r:id="rId22"/>
-    <p:sldId id="258" r:id="rId23"/>
+    <p:sldId id="278" r:id="rId15"/>
+    <p:sldId id="279" r:id="rId16"/>
+    <p:sldId id="280" r:id="rId17"/>
+    <p:sldId id="258" r:id="rId18"/>
   </p:sldIdLst>
   <p:sldSz cx="12192000" cy="6858000"/>
   <p:notesSz cx="6858000" cy="9144000"/>
@@ -221,7 +216,7 @@
           <a:p>
             <a:fld id="{F958DB6F-D407-4DAD-8E07-F71A85896F6E}" type="datetimeFigureOut">
               <a:rPr lang="nl-NL" smtClean="0"/>
-              <a:t>12-2-2026</a:t>
+              <a:t>7-3-2026</a:t>
             </a:fld>
             <a:endParaRPr lang="nl-NL"/>
           </a:p>
@@ -640,7 +635,7 @@
           <a:p>
             <a:fld id="{6D18414D-5A9A-49A8-AA48-E9E7CADEA260}" type="datetimeFigureOut">
               <a:rPr lang="nl-NL" smtClean="0"/>
-              <a:t>12-2-2026</a:t>
+              <a:t>7-3-2026</a:t>
             </a:fld>
             <a:endParaRPr lang="nl-NL"/>
           </a:p>
@@ -848,7 +843,7 @@
           <a:p>
             <a:fld id="{6D18414D-5A9A-49A8-AA48-E9E7CADEA260}" type="datetimeFigureOut">
               <a:rPr lang="nl-NL" smtClean="0"/>
-              <a:t>12-2-2026</a:t>
+              <a:t>7-3-2026</a:t>
             </a:fld>
             <a:endParaRPr lang="nl-NL"/>
           </a:p>
@@ -1057,7 +1052,7 @@
           <a:p>
             <a:fld id="{6D18414D-5A9A-49A8-AA48-E9E7CADEA260}" type="datetimeFigureOut">
               <a:rPr lang="nl-NL" smtClean="0"/>
-              <a:t>12-2-2026</a:t>
+              <a:t>7-3-2026</a:t>
             </a:fld>
             <a:endParaRPr lang="nl-NL"/>
           </a:p>
@@ -1255,7 +1250,7 @@
           <a:p>
             <a:fld id="{6D18414D-5A9A-49A8-AA48-E9E7CADEA260}" type="datetimeFigureOut">
               <a:rPr lang="nl-NL" smtClean="0"/>
-              <a:t>12-2-2026</a:t>
+              <a:t>7-3-2026</a:t>
             </a:fld>
             <a:endParaRPr lang="nl-NL"/>
           </a:p>
@@ -1530,7 +1525,7 @@
           <a:p>
             <a:fld id="{6D18414D-5A9A-49A8-AA48-E9E7CADEA260}" type="datetimeFigureOut">
               <a:rPr lang="nl-NL" smtClean="0"/>
-              <a:t>12-2-2026</a:t>
+              <a:t>7-3-2026</a:t>
             </a:fld>
             <a:endParaRPr lang="nl-NL"/>
           </a:p>
@@ -1795,7 +1790,7 @@
           <a:p>
             <a:fld id="{6D18414D-5A9A-49A8-AA48-E9E7CADEA260}" type="datetimeFigureOut">
               <a:rPr lang="nl-NL" smtClean="0"/>
-              <a:t>12-2-2026</a:t>
+              <a:t>7-3-2026</a:t>
             </a:fld>
             <a:endParaRPr lang="nl-NL"/>
           </a:p>
@@ -2208,7 +2203,7 @@
           <a:p>
             <a:fld id="{6D18414D-5A9A-49A8-AA48-E9E7CADEA260}" type="datetimeFigureOut">
               <a:rPr lang="nl-NL" smtClean="0"/>
-              <a:t>12-2-2026</a:t>
+              <a:t>7-3-2026</a:t>
             </a:fld>
             <a:endParaRPr lang="nl-NL"/>
           </a:p>
@@ -2349,7 +2344,7 @@
           <a:p>
             <a:fld id="{6D18414D-5A9A-49A8-AA48-E9E7CADEA260}" type="datetimeFigureOut">
               <a:rPr lang="nl-NL" smtClean="0"/>
-              <a:t>12-2-2026</a:t>
+              <a:t>7-3-2026</a:t>
             </a:fld>
             <a:endParaRPr lang="nl-NL"/>
           </a:p>
@@ -2462,7 +2457,7 @@
           <a:p>
             <a:fld id="{6D18414D-5A9A-49A8-AA48-E9E7CADEA260}" type="datetimeFigureOut">
               <a:rPr lang="nl-NL" smtClean="0"/>
-              <a:t>12-2-2026</a:t>
+              <a:t>7-3-2026</a:t>
             </a:fld>
             <a:endParaRPr lang="nl-NL"/>
           </a:p>
@@ -2773,7 +2768,7 @@
           <a:p>
             <a:fld id="{6D18414D-5A9A-49A8-AA48-E9E7CADEA260}" type="datetimeFigureOut">
               <a:rPr lang="nl-NL" smtClean="0"/>
-              <a:t>12-2-2026</a:t>
+              <a:t>7-3-2026</a:t>
             </a:fld>
             <a:endParaRPr lang="nl-NL"/>
           </a:p>
@@ -3064,7 +3059,7 @@
           <a:p>
             <a:fld id="{6D18414D-5A9A-49A8-AA48-E9E7CADEA260}" type="datetimeFigureOut">
               <a:rPr lang="nl-NL" smtClean="0"/>
-              <a:t>12-2-2026</a:t>
+              <a:t>7-3-2026</a:t>
             </a:fld>
             <a:endParaRPr lang="nl-NL"/>
           </a:p>
@@ -3256,7 +3251,7 @@
           <a:p>
             <a:fld id="{6D18414D-5A9A-49A8-AA48-E9E7CADEA260}" type="datetimeFigureOut">
               <a:rPr lang="nl-NL" smtClean="0"/>
-              <a:t>12-2-2026</a:t>
+              <a:t>7-3-2026</a:t>
             </a:fld>
             <a:endParaRPr lang="nl-NL" dirty="0"/>
           </a:p>
@@ -4251,15 +4246,7 @@
           <a:p>
             <a:r>
               <a:rPr lang="nl-NL" dirty="0"/>
-              <a:t>Aansprakelijkheid – bedrijven en de bestuurders kunnen </a:t>
-            </a:r>
-            <a:r>
-              <a:rPr lang="nl-NL" dirty="0" err="1"/>
-              <a:t>aanspraakelijk</a:t>
-            </a:r>
-            <a:r>
-              <a:rPr lang="nl-NL" dirty="0"/>
-              <a:t> gemaakt worden en dus gestraft worden.</a:t>
+              <a:t>Aansprakelijkheid – bedrijven en de bestuurders kunnen aansprakelijk gemaakt worden en dus gestraft worden.</a:t>
             </a:r>
           </a:p>
           <a:p>
@@ -4726,971 +4713,6 @@
           <p:cNvPr id="2" name="Titel 1">
             <a:extLst>
               <a:ext uri="{FF2B5EF4-FFF2-40B4-BE49-F238E27FC236}">
-                <a16:creationId xmlns:a16="http://schemas.microsoft.com/office/drawing/2014/main" id="{21F9C215-209B-2D59-D66B-B594E5D05560}"/>
-              </a:ext>
-            </a:extLst>
-          </p:cNvPr>
-          <p:cNvSpPr>
-            <a:spLocks noGrp="1"/>
-          </p:cNvSpPr>
-          <p:nvPr>
-            <p:ph type="title"/>
-          </p:nvPr>
-        </p:nvSpPr>
-        <p:spPr/>
-        <p:txBody>
-          <a:bodyPr/>
-          <a:lstStyle/>
-          <a:p>
-            <a:r>
-              <a:rPr lang="nl-NL" noProof="0" dirty="0"/>
-              <a:t>Klassen discussie – Cyber wetgevingen</a:t>
-            </a:r>
-          </a:p>
-        </p:txBody>
-      </p:sp>
-      <p:sp>
-        <p:nvSpPr>
-          <p:cNvPr id="3" name="Tijdelijke aanduiding voor inhoud 2">
-            <a:extLst>
-              <a:ext uri="{FF2B5EF4-FFF2-40B4-BE49-F238E27FC236}">
-                <a16:creationId xmlns:a16="http://schemas.microsoft.com/office/drawing/2014/main" id="{AF3A6899-62CC-5FBF-E253-D7D8CF3C7C7A}"/>
-              </a:ext>
-            </a:extLst>
-          </p:cNvPr>
-          <p:cNvSpPr>
-            <a:spLocks noGrp="1"/>
-          </p:cNvSpPr>
-          <p:nvPr>
-            <p:ph idx="1"/>
-          </p:nvPr>
-        </p:nvSpPr>
-        <p:spPr/>
-        <p:txBody>
-          <a:bodyPr>
-            <a:normAutofit fontScale="92500" lnSpcReduction="10000"/>
-          </a:bodyPr>
-          <a:lstStyle/>
-          <a:p>
-            <a:r>
-              <a:rPr lang="nl-NL" noProof="0" dirty="0"/>
-              <a:t>Stelling 1: Nieuwe IT/software moet eerst gereguleerd worden voordat het publiek toegang krijgt</a:t>
-            </a:r>
-          </a:p>
-          <a:p>
-            <a:endParaRPr lang="nl-NL" noProof="0" dirty="0"/>
-          </a:p>
-          <a:p>
-            <a:r>
-              <a:rPr lang="nl-NL" noProof="0" dirty="0"/>
-              <a:t>Stelling 2: </a:t>
-            </a:r>
-            <a:r>
-              <a:rPr lang="nl-NL" noProof="0" dirty="0" err="1"/>
-              <a:t>Social</a:t>
-            </a:r>
-            <a:r>
-              <a:rPr lang="nl-NL" noProof="0" dirty="0"/>
-              <a:t> media moet geblokkeerd worden voor kinderen jonger dan 16</a:t>
-            </a:r>
-          </a:p>
-          <a:p>
-            <a:endParaRPr lang="nl-NL" noProof="0" dirty="0"/>
-          </a:p>
-          <a:p>
-            <a:r>
-              <a:rPr lang="nl-NL" noProof="0" dirty="0"/>
-              <a:t>Stelling 3: AI gebruik moet gelimiteerd worden voor jongeren</a:t>
-            </a:r>
-          </a:p>
-          <a:p>
-            <a:endParaRPr lang="nl-NL" noProof="0" dirty="0"/>
-          </a:p>
-          <a:p>
-            <a:r>
-              <a:rPr lang="nl-NL" noProof="0" dirty="0"/>
-              <a:t>Stelling 4: AI ontwikkeling moet stoppen tot opwarming gestopt is</a:t>
-            </a:r>
-          </a:p>
-        </p:txBody>
-      </p:sp>
-    </p:spTree>
-    <p:extLst>
-      <p:ext uri="{BB962C8B-B14F-4D97-AF65-F5344CB8AC3E}">
-        <p14:creationId xmlns:p14="http://schemas.microsoft.com/office/powerpoint/2010/main" val="247373139"/>
-      </p:ext>
-    </p:extLst>
-  </p:cSld>
-  <p:clrMapOvr>
-    <a:masterClrMapping/>
-  </p:clrMapOvr>
-</p:sld>
-</file>
-
-<file path=ppt/slides/slide15.xml><?xml version="1.0" encoding="utf-8"?>
-<p:sld xmlns:a="http://schemas.openxmlformats.org/drawingml/2006/main" xmlns:r="http://schemas.openxmlformats.org/officeDocument/2006/relationships" xmlns:p="http://schemas.openxmlformats.org/presentationml/2006/main">
-  <p:cSld>
-    <p:spTree>
-      <p:nvGrpSpPr>
-        <p:cNvPr id="1" name=""/>
-        <p:cNvGrpSpPr/>
-        <p:nvPr/>
-      </p:nvGrpSpPr>
-      <p:grpSpPr>
-        <a:xfrm>
-          <a:off x="0" y="0"/>
-          <a:ext cx="0" cy="0"/>
-          <a:chOff x="0" y="0"/>
-          <a:chExt cx="0" cy="0"/>
-        </a:xfrm>
-      </p:grpSpPr>
-      <p:sp>
-        <p:nvSpPr>
-          <p:cNvPr id="2" name="Titel 1">
-            <a:extLst>
-              <a:ext uri="{FF2B5EF4-FFF2-40B4-BE49-F238E27FC236}">
-                <a16:creationId xmlns:a16="http://schemas.microsoft.com/office/drawing/2014/main" id="{9482E2F7-AA2C-F6BA-1853-513ED24101EF}"/>
-              </a:ext>
-            </a:extLst>
-          </p:cNvPr>
-          <p:cNvSpPr>
-            <a:spLocks noGrp="1"/>
-          </p:cNvSpPr>
-          <p:nvPr>
-            <p:ph type="title"/>
-          </p:nvPr>
-        </p:nvSpPr>
-        <p:spPr>
-          <a:xfrm>
-            <a:off x="839788" y="365125"/>
-            <a:ext cx="10515600" cy="1267294"/>
-          </a:xfrm>
-        </p:spPr>
-        <p:txBody>
-          <a:bodyPr>
-            <a:normAutofit fontScale="90000"/>
-          </a:bodyPr>
-          <a:lstStyle/>
-          <a:p>
-            <a:r>
-              <a:rPr lang="nl-NL" sz="4000" noProof="0" dirty="0"/>
-              <a:t>Stelling 1: Nieuwe IT/software moet eerst gereguleerd worden voordat het publiek toegang krijgt</a:t>
-            </a:r>
-            <a:endParaRPr lang="nl-NL" noProof="0" dirty="0"/>
-          </a:p>
-        </p:txBody>
-      </p:sp>
-      <p:sp>
-        <p:nvSpPr>
-          <p:cNvPr id="5" name="Tijdelijke aanduiding voor tekst 4">
-            <a:extLst>
-              <a:ext uri="{FF2B5EF4-FFF2-40B4-BE49-F238E27FC236}">
-                <a16:creationId xmlns:a16="http://schemas.microsoft.com/office/drawing/2014/main" id="{78E1EA39-C3B7-1926-161F-1385AB75809E}"/>
-              </a:ext>
-            </a:extLst>
-          </p:cNvPr>
-          <p:cNvSpPr>
-            <a:spLocks noGrp="1"/>
-          </p:cNvSpPr>
-          <p:nvPr>
-            <p:ph type="body" idx="1"/>
-          </p:nvPr>
-        </p:nvSpPr>
-        <p:spPr/>
-        <p:txBody>
-          <a:bodyPr/>
-          <a:lstStyle/>
-          <a:p>
-            <a:r>
-              <a:rPr lang="nl-NL" noProof="0" dirty="0"/>
-              <a:t>Voor</a:t>
-            </a:r>
-          </a:p>
-        </p:txBody>
-      </p:sp>
-      <p:sp>
-        <p:nvSpPr>
-          <p:cNvPr id="6" name="Tijdelijke aanduiding voor inhoud 5">
-            <a:extLst>
-              <a:ext uri="{FF2B5EF4-FFF2-40B4-BE49-F238E27FC236}">
-                <a16:creationId xmlns:a16="http://schemas.microsoft.com/office/drawing/2014/main" id="{64BC35C0-62B8-9895-F541-5A570742783A}"/>
-              </a:ext>
-            </a:extLst>
-          </p:cNvPr>
-          <p:cNvSpPr>
-            <a:spLocks noGrp="1"/>
-          </p:cNvSpPr>
-          <p:nvPr>
-            <p:ph sz="half" idx="2"/>
-          </p:nvPr>
-        </p:nvSpPr>
-        <p:spPr/>
-        <p:txBody>
-          <a:bodyPr/>
-          <a:lstStyle/>
-          <a:p>
-            <a:r>
-              <a:rPr lang="nl-NL" noProof="0" dirty="0"/>
-              <a:t>5,5</a:t>
-            </a:r>
-          </a:p>
-          <a:p>
-            <a:r>
-              <a:rPr lang="nl-NL" dirty="0"/>
-              <a:t>Meer veiligheid</a:t>
-            </a:r>
-          </a:p>
-          <a:p>
-            <a:endParaRPr lang="nl-NL" noProof="0" dirty="0"/>
-          </a:p>
-        </p:txBody>
-      </p:sp>
-      <p:sp>
-        <p:nvSpPr>
-          <p:cNvPr id="7" name="Tijdelijke aanduiding voor tekst 6">
-            <a:extLst>
-              <a:ext uri="{FF2B5EF4-FFF2-40B4-BE49-F238E27FC236}">
-                <a16:creationId xmlns:a16="http://schemas.microsoft.com/office/drawing/2014/main" id="{7DD6099B-3E97-3210-2A70-E845438E4FE4}"/>
-              </a:ext>
-            </a:extLst>
-          </p:cNvPr>
-          <p:cNvSpPr>
-            <a:spLocks noGrp="1"/>
-          </p:cNvSpPr>
-          <p:nvPr>
-            <p:ph type="body" sz="quarter" idx="3"/>
-          </p:nvPr>
-        </p:nvSpPr>
-        <p:spPr/>
-        <p:txBody>
-          <a:bodyPr/>
-          <a:lstStyle/>
-          <a:p>
-            <a:r>
-              <a:rPr lang="nl-NL" noProof="0" dirty="0"/>
-              <a:t>Tegen</a:t>
-            </a:r>
-          </a:p>
-        </p:txBody>
-      </p:sp>
-      <p:sp>
-        <p:nvSpPr>
-          <p:cNvPr id="8" name="Tijdelijke aanduiding voor inhoud 7">
-            <a:extLst>
-              <a:ext uri="{FF2B5EF4-FFF2-40B4-BE49-F238E27FC236}">
-                <a16:creationId xmlns:a16="http://schemas.microsoft.com/office/drawing/2014/main" id="{6BF5CD2E-7E0D-D7F6-A06E-3421C2249C6C}"/>
-              </a:ext>
-            </a:extLst>
-          </p:cNvPr>
-          <p:cNvSpPr>
-            <a:spLocks noGrp="1"/>
-          </p:cNvSpPr>
-          <p:nvPr>
-            <p:ph sz="quarter" idx="4"/>
-          </p:nvPr>
-        </p:nvSpPr>
-        <p:spPr/>
-        <p:txBody>
-          <a:bodyPr/>
-          <a:lstStyle/>
-          <a:p>
-            <a:r>
-              <a:rPr lang="nl-NL" noProof="0" dirty="0"/>
-              <a:t>3,5</a:t>
-            </a:r>
-          </a:p>
-          <a:p>
-            <a:r>
-              <a:rPr lang="nl-NL" dirty="0"/>
-              <a:t>Wetten maken gaat lastig zonder gebruik</a:t>
-            </a:r>
-            <a:endParaRPr lang="nl-NL" noProof="0" dirty="0"/>
-          </a:p>
-        </p:txBody>
-      </p:sp>
-    </p:spTree>
-    <p:extLst>
-      <p:ext uri="{BB962C8B-B14F-4D97-AF65-F5344CB8AC3E}">
-        <p14:creationId xmlns:p14="http://schemas.microsoft.com/office/powerpoint/2010/main" val="4037794842"/>
-      </p:ext>
-    </p:extLst>
-  </p:cSld>
-  <p:clrMapOvr>
-    <a:masterClrMapping/>
-  </p:clrMapOvr>
-</p:sld>
-</file>
-
-<file path=ppt/slides/slide16.xml><?xml version="1.0" encoding="utf-8"?>
-<p:sld xmlns:a="http://schemas.openxmlformats.org/drawingml/2006/main" xmlns:r="http://schemas.openxmlformats.org/officeDocument/2006/relationships" xmlns:p="http://schemas.openxmlformats.org/presentationml/2006/main">
-  <p:cSld>
-    <p:spTree>
-      <p:nvGrpSpPr>
-        <p:cNvPr id="1" name="">
-          <a:extLst>
-            <a:ext uri="{FF2B5EF4-FFF2-40B4-BE49-F238E27FC236}">
-              <a16:creationId xmlns:a16="http://schemas.microsoft.com/office/drawing/2014/main" id="{11F5ABBF-EF3A-FFA6-1F94-EDE33BD29694}"/>
-            </a:ext>
-          </a:extLst>
-        </p:cNvPr>
-        <p:cNvGrpSpPr/>
-        <p:nvPr/>
-      </p:nvGrpSpPr>
-      <p:grpSpPr>
-        <a:xfrm>
-          <a:off x="0" y="0"/>
-          <a:ext cx="0" cy="0"/>
-          <a:chOff x="0" y="0"/>
-          <a:chExt cx="0" cy="0"/>
-        </a:xfrm>
-      </p:grpSpPr>
-      <p:sp>
-        <p:nvSpPr>
-          <p:cNvPr id="2" name="Titel 1">
-            <a:extLst>
-              <a:ext uri="{FF2B5EF4-FFF2-40B4-BE49-F238E27FC236}">
-                <a16:creationId xmlns:a16="http://schemas.microsoft.com/office/drawing/2014/main" id="{D2CC18FF-E317-B448-E95B-03DBA281CE52}"/>
-              </a:ext>
-            </a:extLst>
-          </p:cNvPr>
-          <p:cNvSpPr>
-            <a:spLocks noGrp="1"/>
-          </p:cNvSpPr>
-          <p:nvPr>
-            <p:ph type="title"/>
-          </p:nvPr>
-        </p:nvSpPr>
-        <p:spPr>
-          <a:xfrm>
-            <a:off x="839788" y="365125"/>
-            <a:ext cx="10515600" cy="1291841"/>
-          </a:xfrm>
-        </p:spPr>
-        <p:txBody>
-          <a:bodyPr>
-            <a:normAutofit/>
-          </a:bodyPr>
-          <a:lstStyle/>
-          <a:p>
-            <a:r>
-              <a:rPr lang="nl-NL" sz="4000" noProof="0" dirty="0"/>
-              <a:t>Stelling 2: </a:t>
-            </a:r>
-            <a:r>
-              <a:rPr lang="nl-NL" sz="4000" noProof="0" dirty="0" err="1"/>
-              <a:t>Social</a:t>
-            </a:r>
-            <a:r>
-              <a:rPr lang="nl-NL" sz="4000" noProof="0" dirty="0"/>
-              <a:t> media moet geblokkeerd worden voor kinderen jonger dan 16</a:t>
-            </a:r>
-            <a:endParaRPr lang="nl-NL" noProof="0" dirty="0"/>
-          </a:p>
-        </p:txBody>
-      </p:sp>
-      <p:sp>
-        <p:nvSpPr>
-          <p:cNvPr id="5" name="Tijdelijke aanduiding voor tekst 4">
-            <a:extLst>
-              <a:ext uri="{FF2B5EF4-FFF2-40B4-BE49-F238E27FC236}">
-                <a16:creationId xmlns:a16="http://schemas.microsoft.com/office/drawing/2014/main" id="{E0387793-4C47-3FD0-DF84-058A27E0FD50}"/>
-              </a:ext>
-            </a:extLst>
-          </p:cNvPr>
-          <p:cNvSpPr>
-            <a:spLocks noGrp="1"/>
-          </p:cNvSpPr>
-          <p:nvPr>
-            <p:ph type="body" idx="1"/>
-          </p:nvPr>
-        </p:nvSpPr>
-        <p:spPr/>
-        <p:txBody>
-          <a:bodyPr/>
-          <a:lstStyle/>
-          <a:p>
-            <a:r>
-              <a:rPr lang="nl-NL" noProof="0" dirty="0"/>
-              <a:t>Voor</a:t>
-            </a:r>
-          </a:p>
-        </p:txBody>
-      </p:sp>
-      <p:sp>
-        <p:nvSpPr>
-          <p:cNvPr id="6" name="Tijdelijke aanduiding voor inhoud 5">
-            <a:extLst>
-              <a:ext uri="{FF2B5EF4-FFF2-40B4-BE49-F238E27FC236}">
-                <a16:creationId xmlns:a16="http://schemas.microsoft.com/office/drawing/2014/main" id="{AA22FCDB-9FBE-EF45-3DC5-BC2810CF4E17}"/>
-              </a:ext>
-            </a:extLst>
-          </p:cNvPr>
-          <p:cNvSpPr>
-            <a:spLocks noGrp="1"/>
-          </p:cNvSpPr>
-          <p:nvPr>
-            <p:ph sz="half" idx="2"/>
-          </p:nvPr>
-        </p:nvSpPr>
-        <p:spPr/>
-        <p:txBody>
-          <a:bodyPr/>
-          <a:lstStyle/>
-          <a:p>
-            <a:r>
-              <a:rPr lang="nl-NL" noProof="0" dirty="0"/>
-              <a:t>6</a:t>
-            </a:r>
-          </a:p>
-          <a:p>
-            <a:r>
-              <a:rPr lang="nl-NL" dirty="0"/>
-              <a:t>Slechte invloed op jeugd</a:t>
-            </a:r>
-          </a:p>
-          <a:p>
-            <a:r>
-              <a:rPr lang="nl-NL" noProof="0" dirty="0"/>
-              <a:t>Verslaving aan telefoon</a:t>
-            </a:r>
-          </a:p>
-          <a:p>
-            <a:endParaRPr lang="nl-NL" noProof="0" dirty="0"/>
-          </a:p>
-        </p:txBody>
-      </p:sp>
-      <p:sp>
-        <p:nvSpPr>
-          <p:cNvPr id="7" name="Tijdelijke aanduiding voor tekst 6">
-            <a:extLst>
-              <a:ext uri="{FF2B5EF4-FFF2-40B4-BE49-F238E27FC236}">
-                <a16:creationId xmlns:a16="http://schemas.microsoft.com/office/drawing/2014/main" id="{600B7968-3771-E543-0865-A89EB7C5D612}"/>
-              </a:ext>
-            </a:extLst>
-          </p:cNvPr>
-          <p:cNvSpPr>
-            <a:spLocks noGrp="1"/>
-          </p:cNvSpPr>
-          <p:nvPr>
-            <p:ph type="body" sz="quarter" idx="3"/>
-          </p:nvPr>
-        </p:nvSpPr>
-        <p:spPr/>
-        <p:txBody>
-          <a:bodyPr/>
-          <a:lstStyle/>
-          <a:p>
-            <a:r>
-              <a:rPr lang="nl-NL" noProof="0" dirty="0"/>
-              <a:t>Tegen</a:t>
-            </a:r>
-          </a:p>
-        </p:txBody>
-      </p:sp>
-      <p:sp>
-        <p:nvSpPr>
-          <p:cNvPr id="8" name="Tijdelijke aanduiding voor inhoud 7">
-            <a:extLst>
-              <a:ext uri="{FF2B5EF4-FFF2-40B4-BE49-F238E27FC236}">
-                <a16:creationId xmlns:a16="http://schemas.microsoft.com/office/drawing/2014/main" id="{E6F2C46C-664E-D021-1F6F-FCBEDC7E8E76}"/>
-              </a:ext>
-            </a:extLst>
-          </p:cNvPr>
-          <p:cNvSpPr>
-            <a:spLocks noGrp="1"/>
-          </p:cNvSpPr>
-          <p:nvPr>
-            <p:ph sz="quarter" idx="4"/>
-          </p:nvPr>
-        </p:nvSpPr>
-        <p:spPr/>
-        <p:txBody>
-          <a:bodyPr/>
-          <a:lstStyle/>
-          <a:p>
-            <a:endParaRPr lang="nl-NL" noProof="0" dirty="0"/>
-          </a:p>
-          <a:p>
-            <a:r>
-              <a:rPr lang="nl-NL" dirty="0"/>
-              <a:t>Kinderen vinden wel manieren</a:t>
-            </a:r>
-            <a:endParaRPr lang="nl-NL" noProof="0" dirty="0"/>
-          </a:p>
-        </p:txBody>
-      </p:sp>
-    </p:spTree>
-    <p:extLst>
-      <p:ext uri="{BB962C8B-B14F-4D97-AF65-F5344CB8AC3E}">
-        <p14:creationId xmlns:p14="http://schemas.microsoft.com/office/powerpoint/2010/main" val="4142906696"/>
-      </p:ext>
-    </p:extLst>
-  </p:cSld>
-  <p:clrMapOvr>
-    <a:masterClrMapping/>
-  </p:clrMapOvr>
-</p:sld>
-</file>
-
-<file path=ppt/slides/slide17.xml><?xml version="1.0" encoding="utf-8"?>
-<p:sld xmlns:a="http://schemas.openxmlformats.org/drawingml/2006/main" xmlns:r="http://schemas.openxmlformats.org/officeDocument/2006/relationships" xmlns:p="http://schemas.openxmlformats.org/presentationml/2006/main">
-  <p:cSld>
-    <p:spTree>
-      <p:nvGrpSpPr>
-        <p:cNvPr id="1" name="">
-          <a:extLst>
-            <a:ext uri="{FF2B5EF4-FFF2-40B4-BE49-F238E27FC236}">
-              <a16:creationId xmlns:a16="http://schemas.microsoft.com/office/drawing/2014/main" id="{EA7DA4DF-1A06-397F-6C3C-62C08FC493A0}"/>
-            </a:ext>
-          </a:extLst>
-        </p:cNvPr>
-        <p:cNvGrpSpPr/>
-        <p:nvPr/>
-      </p:nvGrpSpPr>
-      <p:grpSpPr>
-        <a:xfrm>
-          <a:off x="0" y="0"/>
-          <a:ext cx="0" cy="0"/>
-          <a:chOff x="0" y="0"/>
-          <a:chExt cx="0" cy="0"/>
-        </a:xfrm>
-      </p:grpSpPr>
-      <p:sp>
-        <p:nvSpPr>
-          <p:cNvPr id="2" name="Titel 1">
-            <a:extLst>
-              <a:ext uri="{FF2B5EF4-FFF2-40B4-BE49-F238E27FC236}">
-                <a16:creationId xmlns:a16="http://schemas.microsoft.com/office/drawing/2014/main" id="{73E14F8F-29C2-4B3E-3A54-8D5F84D81EB3}"/>
-              </a:ext>
-            </a:extLst>
-          </p:cNvPr>
-          <p:cNvSpPr>
-            <a:spLocks noGrp="1"/>
-          </p:cNvSpPr>
-          <p:nvPr>
-            <p:ph type="title"/>
-          </p:nvPr>
-        </p:nvSpPr>
-        <p:spPr>
-          <a:xfrm>
-            <a:off x="839788" y="365125"/>
-            <a:ext cx="10515600" cy="1457538"/>
-          </a:xfrm>
-        </p:spPr>
-        <p:txBody>
-          <a:bodyPr>
-            <a:normAutofit/>
-          </a:bodyPr>
-          <a:lstStyle/>
-          <a:p>
-            <a:r>
-              <a:rPr lang="nl-NL" sz="4000" noProof="0" dirty="0"/>
-              <a:t>Stelling 3: AI gebruik moet gelimiteerd worden voor jongeren</a:t>
-            </a:r>
-            <a:endParaRPr lang="nl-NL" noProof="0" dirty="0"/>
-          </a:p>
-        </p:txBody>
-      </p:sp>
-      <p:sp>
-        <p:nvSpPr>
-          <p:cNvPr id="5" name="Tijdelijke aanduiding voor tekst 4">
-            <a:extLst>
-              <a:ext uri="{FF2B5EF4-FFF2-40B4-BE49-F238E27FC236}">
-                <a16:creationId xmlns:a16="http://schemas.microsoft.com/office/drawing/2014/main" id="{70ACFFF0-0D1D-B4E6-DE1B-524649FB41A3}"/>
-              </a:ext>
-            </a:extLst>
-          </p:cNvPr>
-          <p:cNvSpPr>
-            <a:spLocks noGrp="1"/>
-          </p:cNvSpPr>
-          <p:nvPr>
-            <p:ph type="body" idx="1"/>
-          </p:nvPr>
-        </p:nvSpPr>
-        <p:spPr/>
-        <p:txBody>
-          <a:bodyPr/>
-          <a:lstStyle/>
-          <a:p>
-            <a:r>
-              <a:rPr lang="nl-NL" noProof="0" dirty="0"/>
-              <a:t>Voor</a:t>
-            </a:r>
-          </a:p>
-        </p:txBody>
-      </p:sp>
-      <p:sp>
-        <p:nvSpPr>
-          <p:cNvPr id="6" name="Tijdelijke aanduiding voor inhoud 5">
-            <a:extLst>
-              <a:ext uri="{FF2B5EF4-FFF2-40B4-BE49-F238E27FC236}">
-                <a16:creationId xmlns:a16="http://schemas.microsoft.com/office/drawing/2014/main" id="{C0293F49-B5EB-4B2F-C49F-39FB23CFC9BA}"/>
-              </a:ext>
-            </a:extLst>
-          </p:cNvPr>
-          <p:cNvSpPr>
-            <a:spLocks noGrp="1"/>
-          </p:cNvSpPr>
-          <p:nvPr>
-            <p:ph sz="half" idx="2"/>
-          </p:nvPr>
-        </p:nvSpPr>
-        <p:spPr/>
-        <p:txBody>
-          <a:bodyPr/>
-          <a:lstStyle/>
-          <a:p>
-            <a:r>
-              <a:rPr lang="nl-NL" noProof="0" dirty="0"/>
-              <a:t>5</a:t>
-            </a:r>
-          </a:p>
-          <a:p>
-            <a:r>
-              <a:rPr lang="nl-NL" dirty="0" err="1"/>
-              <a:t>Eductief</a:t>
-            </a:r>
-            <a:r>
-              <a:rPr lang="nl-NL" dirty="0"/>
-              <a:t> limiteren</a:t>
-            </a:r>
-            <a:endParaRPr lang="nl-NL" noProof="0" dirty="0"/>
-          </a:p>
-        </p:txBody>
-      </p:sp>
-      <p:sp>
-        <p:nvSpPr>
-          <p:cNvPr id="7" name="Tijdelijke aanduiding voor tekst 6">
-            <a:extLst>
-              <a:ext uri="{FF2B5EF4-FFF2-40B4-BE49-F238E27FC236}">
-                <a16:creationId xmlns:a16="http://schemas.microsoft.com/office/drawing/2014/main" id="{50A70834-5386-3800-A5FD-3696BF274FA2}"/>
-              </a:ext>
-            </a:extLst>
-          </p:cNvPr>
-          <p:cNvSpPr>
-            <a:spLocks noGrp="1"/>
-          </p:cNvSpPr>
-          <p:nvPr>
-            <p:ph type="body" sz="quarter" idx="3"/>
-          </p:nvPr>
-        </p:nvSpPr>
-        <p:spPr/>
-        <p:txBody>
-          <a:bodyPr/>
-          <a:lstStyle/>
-          <a:p>
-            <a:r>
-              <a:rPr lang="nl-NL" noProof="0" dirty="0"/>
-              <a:t>Tegen</a:t>
-            </a:r>
-          </a:p>
-        </p:txBody>
-      </p:sp>
-      <p:sp>
-        <p:nvSpPr>
-          <p:cNvPr id="8" name="Tijdelijke aanduiding voor inhoud 7">
-            <a:extLst>
-              <a:ext uri="{FF2B5EF4-FFF2-40B4-BE49-F238E27FC236}">
-                <a16:creationId xmlns:a16="http://schemas.microsoft.com/office/drawing/2014/main" id="{78CF455B-EB9E-A4AB-ADFD-08825A37B39A}"/>
-              </a:ext>
-            </a:extLst>
-          </p:cNvPr>
-          <p:cNvSpPr>
-            <a:spLocks noGrp="1"/>
-          </p:cNvSpPr>
-          <p:nvPr>
-            <p:ph sz="quarter" idx="4"/>
-          </p:nvPr>
-        </p:nvSpPr>
-        <p:spPr/>
-        <p:txBody>
-          <a:bodyPr/>
-          <a:lstStyle/>
-          <a:p>
-            <a:r>
-              <a:rPr lang="nl-NL" noProof="0" dirty="0"/>
-              <a:t>2</a:t>
-            </a:r>
-          </a:p>
-          <a:p>
-            <a:r>
-              <a:rPr lang="nl-NL" dirty="0"/>
-              <a:t>Beter beleid </a:t>
-            </a:r>
-            <a:r>
-              <a:rPr lang="nl-NL" dirty="0" err="1"/>
-              <a:t>and</a:t>
-            </a:r>
-            <a:r>
-              <a:rPr lang="nl-NL" dirty="0"/>
-              <a:t> limitering</a:t>
-            </a:r>
-            <a:endParaRPr lang="nl-NL" noProof="0" dirty="0"/>
-          </a:p>
-          <a:p>
-            <a:endParaRPr lang="nl-NL" noProof="0" dirty="0"/>
-          </a:p>
-        </p:txBody>
-      </p:sp>
-    </p:spTree>
-    <p:extLst>
-      <p:ext uri="{BB962C8B-B14F-4D97-AF65-F5344CB8AC3E}">
-        <p14:creationId xmlns:p14="http://schemas.microsoft.com/office/powerpoint/2010/main" val="2130815478"/>
-      </p:ext>
-    </p:extLst>
-  </p:cSld>
-  <p:clrMapOvr>
-    <a:masterClrMapping/>
-  </p:clrMapOvr>
-</p:sld>
-</file>
-
-<file path=ppt/slides/slide18.xml><?xml version="1.0" encoding="utf-8"?>
-<p:sld xmlns:a="http://schemas.openxmlformats.org/drawingml/2006/main" xmlns:r="http://schemas.openxmlformats.org/officeDocument/2006/relationships" xmlns:p="http://schemas.openxmlformats.org/presentationml/2006/main">
-  <p:cSld>
-    <p:spTree>
-      <p:nvGrpSpPr>
-        <p:cNvPr id="1" name="">
-          <a:extLst>
-            <a:ext uri="{FF2B5EF4-FFF2-40B4-BE49-F238E27FC236}">
-              <a16:creationId xmlns:a16="http://schemas.microsoft.com/office/drawing/2014/main" id="{18326A78-3CBE-F8F9-91F2-EAA76A81302D}"/>
-            </a:ext>
-          </a:extLst>
-        </p:cNvPr>
-        <p:cNvGrpSpPr/>
-        <p:nvPr/>
-      </p:nvGrpSpPr>
-      <p:grpSpPr>
-        <a:xfrm>
-          <a:off x="0" y="0"/>
-          <a:ext cx="0" cy="0"/>
-          <a:chOff x="0" y="0"/>
-          <a:chExt cx="0" cy="0"/>
-        </a:xfrm>
-      </p:grpSpPr>
-      <p:sp>
-        <p:nvSpPr>
-          <p:cNvPr id="2" name="Titel 1">
-            <a:extLst>
-              <a:ext uri="{FF2B5EF4-FFF2-40B4-BE49-F238E27FC236}">
-                <a16:creationId xmlns:a16="http://schemas.microsoft.com/office/drawing/2014/main" id="{7DD30F87-A532-310F-23A1-F3A2ECFFFE17}"/>
-              </a:ext>
-            </a:extLst>
-          </p:cNvPr>
-          <p:cNvSpPr>
-            <a:spLocks noGrp="1"/>
-          </p:cNvSpPr>
-          <p:nvPr>
-            <p:ph type="title"/>
-          </p:nvPr>
-        </p:nvSpPr>
-        <p:spPr>
-          <a:xfrm>
-            <a:off x="839788" y="365125"/>
-            <a:ext cx="10515600" cy="1457538"/>
-          </a:xfrm>
-        </p:spPr>
-        <p:txBody>
-          <a:bodyPr>
-            <a:normAutofit/>
-          </a:bodyPr>
-          <a:lstStyle/>
-          <a:p>
-            <a:r>
-              <a:rPr lang="nl-NL" sz="4000" noProof="0" dirty="0"/>
-              <a:t>Stelling 4: AI ontwikkeling moet stoppen tot opwarming gestopt is</a:t>
-            </a:r>
-            <a:endParaRPr lang="nl-NL" noProof="0" dirty="0"/>
-          </a:p>
-        </p:txBody>
-      </p:sp>
-      <p:sp>
-        <p:nvSpPr>
-          <p:cNvPr id="5" name="Tijdelijke aanduiding voor tekst 4">
-            <a:extLst>
-              <a:ext uri="{FF2B5EF4-FFF2-40B4-BE49-F238E27FC236}">
-                <a16:creationId xmlns:a16="http://schemas.microsoft.com/office/drawing/2014/main" id="{EB267384-8227-2E6C-9879-E9346AF8AEDF}"/>
-              </a:ext>
-            </a:extLst>
-          </p:cNvPr>
-          <p:cNvSpPr>
-            <a:spLocks noGrp="1"/>
-          </p:cNvSpPr>
-          <p:nvPr>
-            <p:ph type="body" idx="1"/>
-          </p:nvPr>
-        </p:nvSpPr>
-        <p:spPr/>
-        <p:txBody>
-          <a:bodyPr/>
-          <a:lstStyle/>
-          <a:p>
-            <a:r>
-              <a:rPr lang="nl-NL" noProof="0" dirty="0"/>
-              <a:t>Voor</a:t>
-            </a:r>
-          </a:p>
-        </p:txBody>
-      </p:sp>
-      <p:sp>
-        <p:nvSpPr>
-          <p:cNvPr id="6" name="Tijdelijke aanduiding voor inhoud 5">
-            <a:extLst>
-              <a:ext uri="{FF2B5EF4-FFF2-40B4-BE49-F238E27FC236}">
-                <a16:creationId xmlns:a16="http://schemas.microsoft.com/office/drawing/2014/main" id="{75C2C308-A230-A161-AAE8-164A45AF20BE}"/>
-              </a:ext>
-            </a:extLst>
-          </p:cNvPr>
-          <p:cNvSpPr>
-            <a:spLocks noGrp="1"/>
-          </p:cNvSpPr>
-          <p:nvPr>
-            <p:ph sz="half" idx="2"/>
-          </p:nvPr>
-        </p:nvSpPr>
-        <p:spPr/>
-        <p:txBody>
-          <a:bodyPr/>
-          <a:lstStyle/>
-          <a:p>
-            <a:r>
-              <a:rPr lang="nl-NL" noProof="0" dirty="0"/>
-              <a:t>6</a:t>
-            </a:r>
-          </a:p>
-          <a:p>
-            <a:r>
-              <a:rPr lang="nl-NL" dirty="0"/>
-              <a:t>Uitstoot in buiten proportie voor wat je krijgt</a:t>
-            </a:r>
-            <a:endParaRPr lang="nl-NL" noProof="0" dirty="0"/>
-          </a:p>
-        </p:txBody>
-      </p:sp>
-      <p:sp>
-        <p:nvSpPr>
-          <p:cNvPr id="7" name="Tijdelijke aanduiding voor tekst 6">
-            <a:extLst>
-              <a:ext uri="{FF2B5EF4-FFF2-40B4-BE49-F238E27FC236}">
-                <a16:creationId xmlns:a16="http://schemas.microsoft.com/office/drawing/2014/main" id="{AACA923E-B59D-C9C0-6EE7-1C53D45FD630}"/>
-              </a:ext>
-            </a:extLst>
-          </p:cNvPr>
-          <p:cNvSpPr>
-            <a:spLocks noGrp="1"/>
-          </p:cNvSpPr>
-          <p:nvPr>
-            <p:ph type="body" sz="quarter" idx="3"/>
-          </p:nvPr>
-        </p:nvSpPr>
-        <p:spPr/>
-        <p:txBody>
-          <a:bodyPr/>
-          <a:lstStyle/>
-          <a:p>
-            <a:r>
-              <a:rPr lang="nl-NL" noProof="0" dirty="0"/>
-              <a:t>Tegen</a:t>
-            </a:r>
-          </a:p>
-        </p:txBody>
-      </p:sp>
-      <p:sp>
-        <p:nvSpPr>
-          <p:cNvPr id="8" name="Tijdelijke aanduiding voor inhoud 7">
-            <a:extLst>
-              <a:ext uri="{FF2B5EF4-FFF2-40B4-BE49-F238E27FC236}">
-                <a16:creationId xmlns:a16="http://schemas.microsoft.com/office/drawing/2014/main" id="{1C1CD9FD-9DE8-6FFF-F1C6-E16E3EEB400B}"/>
-              </a:ext>
-            </a:extLst>
-          </p:cNvPr>
-          <p:cNvSpPr>
-            <a:spLocks noGrp="1"/>
-          </p:cNvSpPr>
-          <p:nvPr>
-            <p:ph sz="quarter" idx="4"/>
-          </p:nvPr>
-        </p:nvSpPr>
-        <p:spPr/>
-        <p:txBody>
-          <a:bodyPr/>
-          <a:lstStyle/>
-          <a:p>
-            <a:r>
-              <a:rPr lang="nl-NL" dirty="0"/>
-              <a:t>3</a:t>
-            </a:r>
-          </a:p>
-          <a:p>
-            <a:r>
-              <a:rPr lang="nl-NL" noProof="0" dirty="0" err="1"/>
-              <a:t>Opw</a:t>
-            </a:r>
-            <a:r>
-              <a:rPr lang="nl-NL" dirty="0" err="1"/>
-              <a:t>arming</a:t>
-            </a:r>
-            <a:r>
-              <a:rPr lang="nl-NL" dirty="0"/>
-              <a:t> gaat niet stoppen, Klimaat verandering is niet </a:t>
-            </a:r>
-            <a:r>
-              <a:rPr lang="nl-NL" dirty="0" err="1"/>
-              <a:t>omdraaibaar</a:t>
-            </a:r>
-            <a:r>
-              <a:rPr lang="nl-NL" dirty="0"/>
-              <a:t>.</a:t>
-            </a:r>
-          </a:p>
-          <a:p>
-            <a:r>
-              <a:rPr lang="nl-NL" noProof="0" dirty="0"/>
-              <a:t>Stelling – Opnieuw</a:t>
-            </a:r>
-            <a:r>
-              <a:rPr lang="nl-NL" dirty="0"/>
-              <a:t> schrijven</a:t>
-            </a:r>
-            <a:endParaRPr lang="nl-NL" noProof="0" dirty="0"/>
-          </a:p>
-        </p:txBody>
-      </p:sp>
-    </p:spTree>
-    <p:extLst>
-      <p:ext uri="{BB962C8B-B14F-4D97-AF65-F5344CB8AC3E}">
-        <p14:creationId xmlns:p14="http://schemas.microsoft.com/office/powerpoint/2010/main" val="512149109"/>
-      </p:ext>
-    </p:extLst>
-  </p:cSld>
-  <p:clrMapOvr>
-    <a:masterClrMapping/>
-  </p:clrMapOvr>
-</p:sld>
-</file>
-
-<file path=ppt/slides/slide19.xml><?xml version="1.0" encoding="utf-8"?>
-<p:sld xmlns:a="http://schemas.openxmlformats.org/drawingml/2006/main" xmlns:r="http://schemas.openxmlformats.org/officeDocument/2006/relationships" xmlns:p="http://schemas.openxmlformats.org/presentationml/2006/main">
-  <p:cSld>
-    <p:spTree>
-      <p:nvGrpSpPr>
-        <p:cNvPr id="1" name=""/>
-        <p:cNvGrpSpPr/>
-        <p:nvPr/>
-      </p:nvGrpSpPr>
-      <p:grpSpPr>
-        <a:xfrm>
-          <a:off x="0" y="0"/>
-          <a:ext cx="0" cy="0"/>
-          <a:chOff x="0" y="0"/>
-          <a:chExt cx="0" cy="0"/>
-        </a:xfrm>
-      </p:grpSpPr>
-      <p:sp>
-        <p:nvSpPr>
-          <p:cNvPr id="2" name="Titel 1">
-            <a:extLst>
-              <a:ext uri="{FF2B5EF4-FFF2-40B4-BE49-F238E27FC236}">
                 <a16:creationId xmlns:a16="http://schemas.microsoft.com/office/drawing/2014/main" id="{A53AF2EC-5406-A706-CB33-2674C4A51D30}"/>
               </a:ext>
             </a:extLst>
@@ -5808,90 +4830,7 @@
 </p:sld>
 </file>
 
-<file path=ppt/slides/slide2.xml><?xml version="1.0" encoding="utf-8"?>
-<p:sld xmlns:a="http://schemas.openxmlformats.org/drawingml/2006/main" xmlns:r="http://schemas.openxmlformats.org/officeDocument/2006/relationships" xmlns:p="http://schemas.openxmlformats.org/presentationml/2006/main">
-  <p:cSld>
-    <p:spTree>
-      <p:nvGrpSpPr>
-        <p:cNvPr id="1" name=""/>
-        <p:cNvGrpSpPr/>
-        <p:nvPr/>
-      </p:nvGrpSpPr>
-      <p:grpSpPr>
-        <a:xfrm>
-          <a:off x="0" y="0"/>
-          <a:ext cx="0" cy="0"/>
-          <a:chOff x="0" y="0"/>
-          <a:chExt cx="0" cy="0"/>
-        </a:xfrm>
-      </p:grpSpPr>
-      <p:sp>
-        <p:nvSpPr>
-          <p:cNvPr id="2" name="Titel 1">
-            <a:extLst>
-              <a:ext uri="{FF2B5EF4-FFF2-40B4-BE49-F238E27FC236}">
-                <a16:creationId xmlns:a16="http://schemas.microsoft.com/office/drawing/2014/main" id="{BBC467E5-39E6-9E7F-1C58-661632973934}"/>
-              </a:ext>
-            </a:extLst>
-          </p:cNvPr>
-          <p:cNvSpPr>
-            <a:spLocks noGrp="1"/>
-          </p:cNvSpPr>
-          <p:nvPr>
-            <p:ph type="title"/>
-          </p:nvPr>
-        </p:nvSpPr>
-        <p:spPr/>
-        <p:txBody>
-          <a:bodyPr/>
-          <a:lstStyle/>
-          <a:p>
-            <a:r>
-              <a:rPr lang="nl-NL" noProof="0" dirty="0"/>
-              <a:t>Wat weten we nog van vorige les?</a:t>
-            </a:r>
-          </a:p>
-        </p:txBody>
-      </p:sp>
-      <p:sp>
-        <p:nvSpPr>
-          <p:cNvPr id="3" name="Tijdelijke aanduiding voor inhoud 2">
-            <a:extLst>
-              <a:ext uri="{FF2B5EF4-FFF2-40B4-BE49-F238E27FC236}">
-                <a16:creationId xmlns:a16="http://schemas.microsoft.com/office/drawing/2014/main" id="{DE110306-4AAB-9607-E18E-ACBAC34BDE30}"/>
-              </a:ext>
-            </a:extLst>
-          </p:cNvPr>
-          <p:cNvSpPr>
-            <a:spLocks noGrp="1"/>
-          </p:cNvSpPr>
-          <p:nvPr>
-            <p:ph idx="1"/>
-          </p:nvPr>
-        </p:nvSpPr>
-        <p:spPr/>
-        <p:txBody>
-          <a:bodyPr/>
-          <a:lstStyle/>
-          <a:p>
-            <a:endParaRPr lang="nl-NL" noProof="0" dirty="0"/>
-          </a:p>
-        </p:txBody>
-      </p:sp>
-    </p:spTree>
-    <p:extLst>
-      <p:ext uri="{BB962C8B-B14F-4D97-AF65-F5344CB8AC3E}">
-        <p14:creationId xmlns:p14="http://schemas.microsoft.com/office/powerpoint/2010/main" val="3969768279"/>
-      </p:ext>
-    </p:extLst>
-  </p:cSld>
-  <p:clrMapOvr>
-    <a:masterClrMapping/>
-  </p:clrMapOvr>
-</p:sld>
-</file>
-
-<file path=ppt/slides/slide20.xml><?xml version="1.0" encoding="utf-8"?>
+<file path=ppt/slides/slide15.xml><?xml version="1.0" encoding="utf-8"?>
 <p:sld xmlns:a="http://schemas.openxmlformats.org/drawingml/2006/main" xmlns:r="http://schemas.openxmlformats.org/officeDocument/2006/relationships" xmlns:p="http://schemas.openxmlformats.org/presentationml/2006/main">
   <p:cSld>
     <p:spTree>
@@ -6011,7 +4950,7 @@
 </p:sld>
 </file>
 
-<file path=ppt/slides/slide21.xml><?xml version="1.0" encoding="utf-8"?>
+<file path=ppt/slides/slide16.xml><?xml version="1.0" encoding="utf-8"?>
 <p:sld xmlns:a="http://schemas.openxmlformats.org/drawingml/2006/main" xmlns:r="http://schemas.openxmlformats.org/officeDocument/2006/relationships" xmlns:p="http://schemas.openxmlformats.org/presentationml/2006/main">
   <p:cSld>
     <p:spTree>
@@ -6171,7 +5110,7 @@
 </p:sld>
 </file>
 
-<file path=ppt/slides/slide22.xml><?xml version="1.0" encoding="utf-8"?>
+<file path=ppt/slides/slide17.xml><?xml version="1.0" encoding="utf-8"?>
 <p:sld xmlns:a="http://schemas.openxmlformats.org/drawingml/2006/main" xmlns:r="http://schemas.openxmlformats.org/officeDocument/2006/relationships" xmlns:p="http://schemas.openxmlformats.org/presentationml/2006/main">
   <p:cSld>
     <p:spTree>
@@ -6265,6 +5204,89 @@
     <p:extLst>
       <p:ext uri="{BB962C8B-B14F-4D97-AF65-F5344CB8AC3E}">
         <p14:creationId xmlns:p14="http://schemas.microsoft.com/office/powerpoint/2010/main" val="2781021689"/>
+      </p:ext>
+    </p:extLst>
+  </p:cSld>
+  <p:clrMapOvr>
+    <a:masterClrMapping/>
+  </p:clrMapOvr>
+</p:sld>
+</file>
+
+<file path=ppt/slides/slide2.xml><?xml version="1.0" encoding="utf-8"?>
+<p:sld xmlns:a="http://schemas.openxmlformats.org/drawingml/2006/main" xmlns:r="http://schemas.openxmlformats.org/officeDocument/2006/relationships" xmlns:p="http://schemas.openxmlformats.org/presentationml/2006/main">
+  <p:cSld>
+    <p:spTree>
+      <p:nvGrpSpPr>
+        <p:cNvPr id="1" name=""/>
+        <p:cNvGrpSpPr/>
+        <p:nvPr/>
+      </p:nvGrpSpPr>
+      <p:grpSpPr>
+        <a:xfrm>
+          <a:off x="0" y="0"/>
+          <a:ext cx="0" cy="0"/>
+          <a:chOff x="0" y="0"/>
+          <a:chExt cx="0" cy="0"/>
+        </a:xfrm>
+      </p:grpSpPr>
+      <p:sp>
+        <p:nvSpPr>
+          <p:cNvPr id="2" name="Titel 1">
+            <a:extLst>
+              <a:ext uri="{FF2B5EF4-FFF2-40B4-BE49-F238E27FC236}">
+                <a16:creationId xmlns:a16="http://schemas.microsoft.com/office/drawing/2014/main" id="{BBC467E5-39E6-9E7F-1C58-661632973934}"/>
+              </a:ext>
+            </a:extLst>
+          </p:cNvPr>
+          <p:cNvSpPr>
+            <a:spLocks noGrp="1"/>
+          </p:cNvSpPr>
+          <p:nvPr>
+            <p:ph type="title"/>
+          </p:nvPr>
+        </p:nvSpPr>
+        <p:spPr/>
+        <p:txBody>
+          <a:bodyPr/>
+          <a:lstStyle/>
+          <a:p>
+            <a:r>
+              <a:rPr lang="nl-NL" noProof="0" dirty="0"/>
+              <a:t>Wat weten we nog van vorige les?</a:t>
+            </a:r>
+          </a:p>
+        </p:txBody>
+      </p:sp>
+      <p:sp>
+        <p:nvSpPr>
+          <p:cNvPr id="3" name="Tijdelijke aanduiding voor inhoud 2">
+            <a:extLst>
+              <a:ext uri="{FF2B5EF4-FFF2-40B4-BE49-F238E27FC236}">
+                <a16:creationId xmlns:a16="http://schemas.microsoft.com/office/drawing/2014/main" id="{DE110306-4AAB-9607-E18E-ACBAC34BDE30}"/>
+              </a:ext>
+            </a:extLst>
+          </p:cNvPr>
+          <p:cNvSpPr>
+            <a:spLocks noGrp="1"/>
+          </p:cNvSpPr>
+          <p:nvPr>
+            <p:ph idx="1"/>
+          </p:nvPr>
+        </p:nvSpPr>
+        <p:spPr/>
+        <p:txBody>
+          <a:bodyPr/>
+          <a:lstStyle/>
+          <a:p>
+            <a:endParaRPr lang="nl-NL" noProof="0" dirty="0"/>
+          </a:p>
+        </p:txBody>
+      </p:sp>
+    </p:spTree>
+    <p:extLst>
+      <p:ext uri="{BB962C8B-B14F-4D97-AF65-F5344CB8AC3E}">
+        <p14:creationId xmlns:p14="http://schemas.microsoft.com/office/powerpoint/2010/main" val="3969768279"/>
       </p:ext>
     </p:extLst>
   </p:cSld>
